--- a/docs/common/branding/ncar/template.pptx
+++ b/docs/common/branding/ncar/template.pptx
@@ -228,7 +228,7 @@
           <a:p>
             <a:fld id="{0F9C1CCF-B725-44A7-AA57-5E433BD85C9F}" type="datetimeFigureOut">
               <a:rPr lang="en-US" smtClean="0"/>
-              <a:t>4/22/26</a:t>
+              <a:t>4/30/26</a:t>
             </a:fld>
             <a:endParaRPr lang="en-US"/>
           </a:p>
@@ -1090,7 +1090,7 @@
             <a:fld id="{E218F613-5810-D04F-B822-6772AD528273}" type="datetime4">
               <a:rPr lang="en-US" sz="1400" b="1" cap="all" baseline="0" smtClean="0"/>
               <a:pPr/>
-              <a:t>April 22, 2026</a:t>
+              <a:t>April 30, 2026</a:t>
             </a:fld>
             <a:endParaRPr lang="en-US" sz="1400" b="1" cap="all" baseline="0" dirty="0"/>
           </a:p>
@@ -1186,8 +1186,8 @@
             <a:pPr algn="r"/>
             <a:fld id="{34459720-2A4C-D342-9515-00AC0588A96C}" type="datetimeFigureOut">
               <a:rPr lang="en-US" smtClean="0"/>
-              <a:pPr/>
-              <a:t>4/22/26</a:t>
+              <a:pPr algn="r"/>
+              <a:t>4/30/26</a:t>
             </a:fld>
             <a:endParaRPr lang="en-US" dirty="0"/>
           </a:p>
@@ -1556,7 +1556,7 @@
           <a:p>
             <a:fld id="{34459720-2A4C-D342-9515-00AC0588A96C}" type="datetimeFigureOut">
               <a:rPr lang="en-US" smtClean="0"/>
-              <a:t>4/22/26</a:t>
+              <a:t>4/30/26</a:t>
             </a:fld>
             <a:endParaRPr lang="en-US"/>
           </a:p>
@@ -1647,22 +1647,22 @@
         <p:txBody>
           <a:bodyPr/>
           <a:lstStyle>
-            <a:lvl1pPr marL="0" indent="0">
+            <a:lvl1pPr marL="0" indent="-228600">
               <a:buClrTx/>
-              <a:buFontTx/>
-              <a:buNone/>
+              <a:buFont typeface="Arial" panose="020B0604020202020204" pitchFamily="34" charset="0"/>
+              <a:buChar char="•"/>
               <a:defRPr baseline="0">
                 <a:latin typeface="Poppins" pitchFamily="2" charset="77"/>
               </a:defRPr>
             </a:lvl1pPr>
             <a:lvl2pPr marL="457200" indent="-228600">
-              <a:buFont typeface="Arial" panose="020B0604020202020204" pitchFamily="34" charset="0"/>
-              <a:buChar char="•"/>
+              <a:buFont typeface="Wingdings" pitchFamily="2" charset="2"/>
+              <a:buChar char="§"/>
               <a:defRPr baseline="0"/>
             </a:lvl2pPr>
             <a:lvl3pPr marL="914400" indent="-228600">
-              <a:buFont typeface="Wingdings" pitchFamily="2" charset="2"/>
-              <a:buChar char="§"/>
+              <a:buFont typeface="Courier New" panose="02070309020205020404" pitchFamily="49" charset="0"/>
+              <a:buChar char="o"/>
               <a:defRPr baseline="0"/>
             </a:lvl3pPr>
             <a:lvl4pPr marL="1371600" indent="-228600">
@@ -1832,8 +1832,8 @@
             <a:pPr algn="r"/>
             <a:fld id="{34459720-2A4C-D342-9515-00AC0588A96C}" type="datetimeFigureOut">
               <a:rPr lang="en-US" smtClean="0"/>
-              <a:pPr/>
-              <a:t>4/22/26</a:t>
+              <a:pPr algn="r"/>
+              <a:t>4/30/26</a:t>
             </a:fld>
             <a:endParaRPr lang="en-US" dirty="0"/>
           </a:p>
@@ -2242,8 +2242,8 @@
             <a:pPr algn="r"/>
             <a:fld id="{34459720-2A4C-D342-9515-00AC0588A96C}" type="datetimeFigureOut">
               <a:rPr lang="en-US" smtClean="0"/>
-              <a:pPr/>
-              <a:t>4/22/26</a:t>
+              <a:pPr algn="r"/>
+              <a:t>4/30/26</a:t>
             </a:fld>
             <a:endParaRPr lang="en-US" dirty="0"/>
           </a:p>
@@ -2382,17 +2382,18 @@
           <a:bodyPr/>
           <a:lstStyle>
             <a:lvl1pPr>
-              <a:buNone/>
+              <a:buFont typeface="Arial" panose="020B0604020202020204" pitchFamily="34" charset="0"/>
+              <a:buChar char="•"/>
               <a:defRPr sz="2800"/>
             </a:lvl1pPr>
             <a:lvl2pPr marL="457200" indent="-228600">
-              <a:buFont typeface="Arial" panose="020B0604020202020204" pitchFamily="34" charset="0"/>
-              <a:buChar char="•"/>
+              <a:buFont typeface="Wingdings" pitchFamily="2" charset="2"/>
+              <a:buChar char="§"/>
               <a:defRPr sz="2400"/>
             </a:lvl2pPr>
             <a:lvl3pPr marL="914400" indent="-228600">
-              <a:buFont typeface="Wingdings" pitchFamily="2" charset="2"/>
-              <a:buChar char="§"/>
+              <a:buFont typeface="Courier New" panose="02070309020205020404" pitchFamily="49" charset="0"/>
+              <a:buChar char="o"/>
               <a:defRPr sz="2000"/>
             </a:lvl3pPr>
             <a:lvl4pPr marL="1371600" indent="-228600">
@@ -2474,17 +2475,18 @@
           <a:bodyPr/>
           <a:lstStyle>
             <a:lvl1pPr>
-              <a:buNone/>
+              <a:buFont typeface="Arial" panose="020B0604020202020204" pitchFamily="34" charset="0"/>
+              <a:buChar char="•"/>
               <a:defRPr sz="2800"/>
             </a:lvl1pPr>
             <a:lvl2pPr marL="457200" indent="-228600">
-              <a:buFont typeface="Arial" panose="020B0604020202020204" pitchFamily="34" charset="0"/>
-              <a:buChar char="•"/>
+              <a:buFont typeface="Wingdings" pitchFamily="2" charset="2"/>
+              <a:buChar char="§"/>
               <a:defRPr sz="2400"/>
             </a:lvl2pPr>
             <a:lvl3pPr marL="914400" indent="-228600">
-              <a:buFont typeface="Wingdings" pitchFamily="2" charset="2"/>
-              <a:buChar char="§"/>
+              <a:buFont typeface="Courier New" panose="02070309020205020404" pitchFamily="49" charset="0"/>
+              <a:buChar char="o"/>
               <a:defRPr sz="2000"/>
             </a:lvl3pPr>
             <a:lvl4pPr marL="1371600" indent="-228600">
@@ -2713,8 +2715,8 @@
             <a:pPr algn="r"/>
             <a:fld id="{34459720-2A4C-D342-9515-00AC0588A96C}" type="datetimeFigureOut">
               <a:rPr lang="en-US" smtClean="0"/>
-              <a:pPr/>
-              <a:t>4/22/26</a:t>
+              <a:pPr algn="r"/>
+              <a:t>4/30/26</a:t>
             </a:fld>
             <a:endParaRPr lang="en-US" dirty="0"/>
           </a:p>
@@ -3041,17 +3043,18 @@
           <a:bodyPr/>
           <a:lstStyle>
             <a:lvl1pPr>
-              <a:buNone/>
+              <a:buFont typeface="Arial" panose="020B0604020202020204" pitchFamily="34" charset="0"/>
+              <a:buChar char="•"/>
               <a:defRPr sz="2800"/>
             </a:lvl1pPr>
             <a:lvl2pPr marL="457200" indent="-228600">
-              <a:buFont typeface="Arial" panose="020B0604020202020204" pitchFamily="34" charset="0"/>
-              <a:buChar char="•"/>
+              <a:buFont typeface="Wingdings" pitchFamily="2" charset="2"/>
+              <a:buChar char="§"/>
               <a:defRPr sz="2400"/>
             </a:lvl2pPr>
             <a:lvl3pPr marL="914400" indent="-228600">
-              <a:buFont typeface="Wingdings" pitchFamily="2" charset="2"/>
-              <a:buChar char="§"/>
+              <a:buFont typeface="Courier New" panose="02070309020205020404" pitchFamily="49" charset="0"/>
+              <a:buChar char="o"/>
               <a:defRPr sz="2000"/>
             </a:lvl3pPr>
             <a:lvl4pPr marL="1371600" indent="-228600">
@@ -3139,17 +3142,18 @@
           <a:bodyPr/>
           <a:lstStyle>
             <a:lvl1pPr>
-              <a:buNone/>
+              <a:buFont typeface="Arial" panose="020B0604020202020204" pitchFamily="34" charset="0"/>
+              <a:buChar char="•"/>
               <a:defRPr sz="2800"/>
             </a:lvl1pPr>
             <a:lvl2pPr marL="457200" indent="-228600">
-              <a:buFont typeface="Arial" panose="020B0604020202020204" pitchFamily="34" charset="0"/>
-              <a:buChar char="•"/>
+              <a:buFont typeface="Wingdings" pitchFamily="2" charset="2"/>
+              <a:buChar char="§"/>
               <a:defRPr sz="2400"/>
             </a:lvl2pPr>
             <a:lvl3pPr marL="914400" indent="-228600">
-              <a:buFont typeface="Wingdings" pitchFamily="2" charset="2"/>
-              <a:buChar char="§"/>
+              <a:buFont typeface="Courier New" panose="02070309020205020404" pitchFamily="49" charset="0"/>
+              <a:buChar char="o"/>
               <a:defRPr sz="2000"/>
             </a:lvl3pPr>
             <a:lvl4pPr marL="1371600" indent="-228600">
@@ -3248,8 +3252,8 @@
             <a:pPr algn="r"/>
             <a:fld id="{34459720-2A4C-D342-9515-00AC0588A96C}" type="datetimeFigureOut">
               <a:rPr lang="en-US" smtClean="0"/>
-              <a:pPr/>
-              <a:t>4/22/26</a:t>
+              <a:pPr algn="r"/>
+              <a:t>4/30/26</a:t>
             </a:fld>
             <a:endParaRPr lang="en-US" dirty="0"/>
           </a:p>
@@ -3384,17 +3388,18 @@
           <a:bodyPr/>
           <a:lstStyle>
             <a:lvl1pPr>
-              <a:buNone/>
+              <a:buFont typeface="Arial" panose="020B0604020202020204" pitchFamily="34" charset="0"/>
+              <a:buChar char="•"/>
               <a:defRPr sz="3200"/>
             </a:lvl1pPr>
             <a:lvl2pPr>
-              <a:buFont typeface="Arial" panose="020B0604020202020204" pitchFamily="34" charset="0"/>
-              <a:buChar char="•"/>
+              <a:buFont typeface="Wingdings" pitchFamily="2" charset="2"/>
+              <a:buChar char="§"/>
               <a:defRPr sz="2800"/>
             </a:lvl2pPr>
             <a:lvl3pPr>
-              <a:buFont typeface="Wingdings" pitchFamily="2" charset="2"/>
-              <a:buChar char="§"/>
+              <a:buFont typeface="Courier New" panose="02070309020205020404" pitchFamily="49" charset="0"/>
+              <a:buChar char="o"/>
               <a:defRPr sz="2400"/>
             </a:lvl3pPr>
             <a:lvl4pPr>
@@ -3691,8 +3696,8 @@
             <a:pPr algn="r"/>
             <a:fld id="{34459720-2A4C-D342-9515-00AC0588A96C}" type="datetimeFigureOut">
               <a:rPr lang="en-US" smtClean="0"/>
-              <a:pPr/>
-              <a:t>4/22/26</a:t>
+              <a:pPr algn="r"/>
+              <a:t>4/30/26</a:t>
             </a:fld>
             <a:endParaRPr lang="en-US" dirty="0"/>
           </a:p>
@@ -4106,8 +4111,8 @@
             <a:pPr algn="r"/>
             <a:fld id="{34459720-2A4C-D342-9515-00AC0588A96C}" type="datetimeFigureOut">
               <a:rPr lang="en-US" smtClean="0"/>
-              <a:pPr/>
-              <a:t>4/22/26</a:t>
+              <a:pPr algn="r"/>
+              <a:t>4/30/26</a:t>
             </a:fld>
             <a:endParaRPr lang="en-US" dirty="0"/>
           </a:p>
@@ -4568,8 +4573,8 @@
             <a:pPr algn="r"/>
             <a:fld id="{34459720-2A4C-D342-9515-00AC0588A96C}" type="datetimeFigureOut">
               <a:rPr lang="en-US" smtClean="0"/>
-              <a:pPr/>
-              <a:t>4/22/26</a:t>
+              <a:pPr algn="r"/>
+              <a:t>4/30/26</a:t>
             </a:fld>
             <a:endParaRPr lang="en-US" dirty="0"/>
           </a:p>
@@ -4655,12 +4660,15 @@
       </a:lvl1pPr>
     </p:titleStyle>
     <p:bodyStyle>
-      <a:lvl1pPr marL="0" indent="0" algn="l" defTabSz="457189" rtl="0" eaLnBrk="1" latinLnBrk="0" hangingPunct="1">
+      <a:lvl1pPr marL="0" indent="-228600" algn="l" defTabSz="457189" rtl="0" eaLnBrk="1" latinLnBrk="0" hangingPunct="1">
+        <a:lnSpc>
+          <a:spcPct val="100000"/>
+        </a:lnSpc>
         <a:spcBef>
-          <a:spcPct val="20000"/>
+          <a:spcPts val="1000"/>
         </a:spcBef>
-        <a:buFont typeface="Arial"/>
-        <a:buNone/>
+        <a:buFont typeface="Arial" panose="020B0604020202020204" pitchFamily="34" charset="0"/>
+        <a:buChar char="•"/>
         <a:defRPr sz="2800" b="0" kern="1200" baseline="0">
           <a:solidFill>
             <a:schemeClr val="tx1"/>
@@ -4671,11 +4679,14 @@
         </a:defRPr>
       </a:lvl1pPr>
       <a:lvl2pPr marL="457200" indent="-228600" algn="l" defTabSz="457189" rtl="0" eaLnBrk="1" latinLnBrk="0" hangingPunct="1">
+        <a:lnSpc>
+          <a:spcPct val="100000"/>
+        </a:lnSpc>
         <a:spcBef>
-          <a:spcPct val="20000"/>
+          <a:spcPts val="500"/>
         </a:spcBef>
-        <a:buFont typeface="Arial" panose="020B0604020202020204" pitchFamily="34" charset="0"/>
-        <a:buChar char="•"/>
+        <a:buFont typeface="Wingdings" pitchFamily="2" charset="2"/>
+        <a:buChar char="§"/>
         <a:defRPr sz="2400" kern="1200" baseline="0">
           <a:solidFill>
             <a:schemeClr val="tx1"/>
@@ -4686,11 +4697,14 @@
         </a:defRPr>
       </a:lvl2pPr>
       <a:lvl3pPr marL="914400" indent="-228600" algn="l" defTabSz="457189" rtl="0" eaLnBrk="1" latinLnBrk="0" hangingPunct="1">
+        <a:lnSpc>
+          <a:spcPct val="100000"/>
+        </a:lnSpc>
         <a:spcBef>
           <a:spcPct val="20000"/>
         </a:spcBef>
-        <a:buFont typeface="Wingdings" pitchFamily="2" charset="2"/>
-        <a:buChar char="§"/>
+        <a:buFont typeface="Courier New" panose="02070309020205020404" pitchFamily="49" charset="0"/>
+        <a:buChar char="o"/>
         <a:defRPr sz="2000" kern="1200" baseline="0">
           <a:solidFill>
             <a:schemeClr val="tx1"/>
@@ -4701,6 +4715,9 @@
         </a:defRPr>
       </a:lvl3pPr>
       <a:lvl4pPr marL="1371600" indent="-228600" algn="l" defTabSz="457189" rtl="0" eaLnBrk="1" latinLnBrk="0" hangingPunct="1">
+        <a:lnSpc>
+          <a:spcPct val="100000"/>
+        </a:lnSpc>
         <a:spcBef>
           <a:spcPct val="20000"/>
         </a:spcBef>
@@ -4716,6 +4733,9 @@
         </a:defRPr>
       </a:lvl4pPr>
       <a:lvl5pPr marL="1828800" indent="-228600" algn="l" defTabSz="457189" rtl="0" eaLnBrk="1" latinLnBrk="0" hangingPunct="1">
+        <a:lnSpc>
+          <a:spcPct val="100000"/>
+        </a:lnSpc>
         <a:spcBef>
           <a:spcPct val="20000"/>
         </a:spcBef>

--- a/docs/common/branding/ncar/template.pptx
+++ b/docs/common/branding/ncar/template.pptx
@@ -1647,7 +1647,7 @@
         <p:txBody>
           <a:bodyPr/>
           <a:lstStyle>
-            <a:lvl1pPr marL="0" indent="-228600">
+            <a:lvl1pPr marL="228600" indent="-228600">
               <a:buClrTx/>
               <a:buFont typeface="Arial" panose="020B0604020202020204" pitchFamily="34" charset="0"/>
               <a:buChar char="•"/>
@@ -1923,7 +1923,7 @@
         </p:nvSpPr>
         <p:spPr>
           <a:xfrm>
-            <a:off x="609600" y="4406900"/>
+            <a:off x="609600" y="2743200"/>
             <a:ext cx="10972800" cy="1371600"/>
           </a:xfrm>
           <a:prstGeom prst="rect">
@@ -1934,7 +1934,7 @@
           <a:bodyPr anchor="t"/>
           <a:lstStyle>
             <a:lvl1pPr algn="l">
-              <a:defRPr sz="4000" b="1" cap="small" baseline="0">
+              <a:defRPr sz="6000" b="1" cap="small" baseline="0">
                 <a:solidFill>
                   <a:schemeClr val="tx1"/>
                 </a:solidFill>
@@ -1962,8 +1962,8 @@
         </p:nvSpPr>
         <p:spPr>
           <a:xfrm>
-            <a:off x="609600" y="2560320"/>
-            <a:ext cx="10972800" cy="1828800"/>
+            <a:off x="609600" y="4731026"/>
+            <a:ext cx="10972800" cy="1268232"/>
           </a:xfrm>
           <a:prstGeom prst="rect">
             <a:avLst/>
@@ -4660,7 +4660,7 @@
       </a:lvl1pPr>
     </p:titleStyle>
     <p:bodyStyle>
-      <a:lvl1pPr marL="0" indent="-228600" algn="l" defTabSz="457189" rtl="0" eaLnBrk="1" latinLnBrk="0" hangingPunct="1">
+      <a:lvl1pPr marL="228600" indent="-228600" algn="l" defTabSz="457189" rtl="0" eaLnBrk="1" latinLnBrk="0" hangingPunct="1">
         <a:lnSpc>
           <a:spcPct val="100000"/>
         </a:lnSpc>

--- a/docs/common/branding/ncar/template.pptx
+++ b/docs/common/branding/ncar/template.pptx
@@ -2384,35 +2384,35 @@
             <a:lvl1pPr>
               <a:buFont typeface="Arial" panose="020B0604020202020204" pitchFamily="34" charset="0"/>
               <a:buChar char="•"/>
-              <a:defRPr sz="2800"/>
+              <a:defRPr sz="2000"/>
             </a:lvl1pPr>
             <a:lvl2pPr marL="457200" indent="-228600">
               <a:buFont typeface="Wingdings" pitchFamily="2" charset="2"/>
               <a:buChar char="§"/>
-              <a:defRPr sz="2400"/>
+              <a:defRPr sz="1800"/>
             </a:lvl2pPr>
             <a:lvl3pPr marL="914400" indent="-228600">
               <a:buFont typeface="Courier New" panose="02070309020205020404" pitchFamily="49" charset="0"/>
               <a:buChar char="o"/>
-              <a:defRPr sz="2000"/>
+              <a:defRPr sz="1600"/>
             </a:lvl3pPr>
             <a:lvl4pPr marL="1371600" indent="-228600">
-              <a:defRPr sz="1800"/>
+              <a:defRPr sz="1400"/>
             </a:lvl4pPr>
             <a:lvl5pPr marL="1600200" indent="-228600">
-              <a:defRPr sz="1800"/>
+              <a:defRPr sz="1200"/>
             </a:lvl5pPr>
             <a:lvl6pPr>
-              <a:defRPr sz="1800"/>
+              <a:defRPr sz="1200"/>
             </a:lvl6pPr>
             <a:lvl7pPr>
-              <a:defRPr sz="1800"/>
+              <a:defRPr sz="1200"/>
             </a:lvl7pPr>
             <a:lvl8pPr>
-              <a:defRPr sz="1800"/>
+              <a:defRPr sz="1200"/>
             </a:lvl8pPr>
             <a:lvl9pPr>
-              <a:defRPr sz="1800"/>
+              <a:defRPr sz="1200"/>
             </a:lvl9pPr>
           </a:lstStyle>
           <a:p>
@@ -2477,35 +2477,35 @@
             <a:lvl1pPr>
               <a:buFont typeface="Arial" panose="020B0604020202020204" pitchFamily="34" charset="0"/>
               <a:buChar char="•"/>
-              <a:defRPr sz="2800"/>
+              <a:defRPr sz="2000"/>
             </a:lvl1pPr>
             <a:lvl2pPr marL="457200" indent="-228600">
               <a:buFont typeface="Wingdings" pitchFamily="2" charset="2"/>
               <a:buChar char="§"/>
-              <a:defRPr sz="2400"/>
+              <a:defRPr sz="1800"/>
             </a:lvl2pPr>
             <a:lvl3pPr marL="914400" indent="-228600">
               <a:buFont typeface="Courier New" panose="02070309020205020404" pitchFamily="49" charset="0"/>
               <a:buChar char="o"/>
-              <a:defRPr sz="2000"/>
+              <a:defRPr sz="1600"/>
             </a:lvl3pPr>
             <a:lvl4pPr marL="1371600" indent="-228600">
-              <a:defRPr sz="1800"/>
+              <a:defRPr sz="1400"/>
             </a:lvl4pPr>
             <a:lvl5pPr marL="1600200" indent="-228600">
-              <a:defRPr sz="1800"/>
+              <a:defRPr sz="1200"/>
             </a:lvl5pPr>
             <a:lvl6pPr>
-              <a:defRPr sz="1800"/>
+              <a:defRPr sz="1200"/>
             </a:lvl6pPr>
             <a:lvl7pPr>
-              <a:defRPr sz="1800"/>
+              <a:defRPr sz="1200"/>
             </a:lvl7pPr>
             <a:lvl8pPr>
-              <a:defRPr sz="1800"/>
+              <a:defRPr sz="1200"/>
             </a:lvl8pPr>
             <a:lvl9pPr>
-              <a:defRPr sz="1800"/>
+              <a:defRPr sz="1200"/>
             </a:lvl9pPr>
           </a:lstStyle>
           <a:p>
@@ -2852,39 +2852,39 @@
           <a:lstStyle>
             <a:lvl1pPr marL="0" indent="0" algn="ctr">
               <a:buNone/>
-              <a:defRPr sz="2400" b="1"/>
+              <a:defRPr sz="1800" b="1"/>
             </a:lvl1pPr>
             <a:lvl2pPr marL="457189" indent="0">
               <a:buNone/>
-              <a:defRPr sz="2000" b="1"/>
+              <a:defRPr sz="1600" b="1"/>
             </a:lvl2pPr>
             <a:lvl3pPr marL="914377" indent="0">
               <a:buNone/>
-              <a:defRPr sz="1800" b="1"/>
+              <a:defRPr sz="1400" b="1"/>
             </a:lvl3pPr>
             <a:lvl4pPr marL="1371566" indent="0">
               <a:buNone/>
-              <a:defRPr sz="1600" b="1"/>
+              <a:defRPr sz="1200" b="1"/>
             </a:lvl4pPr>
             <a:lvl5pPr marL="1828754" indent="0">
               <a:buNone/>
-              <a:defRPr sz="1600" b="1"/>
+              <a:defRPr sz="1200" b="1"/>
             </a:lvl5pPr>
             <a:lvl6pPr marL="2285943" indent="0">
               <a:buNone/>
-              <a:defRPr sz="1600" b="1"/>
+              <a:defRPr sz="1200" b="1"/>
             </a:lvl6pPr>
             <a:lvl7pPr marL="2743131" indent="0">
               <a:buNone/>
-              <a:defRPr sz="1600" b="1"/>
+              <a:defRPr sz="1200" b="1"/>
             </a:lvl7pPr>
             <a:lvl8pPr marL="3200320" indent="0">
               <a:buNone/>
-              <a:defRPr sz="1600" b="1"/>
+              <a:defRPr sz="1200" b="1"/>
             </a:lvl8pPr>
             <a:lvl9pPr marL="3657509" indent="0">
               <a:buNone/>
-              <a:defRPr sz="1600" b="1"/>
+              <a:defRPr sz="1200" b="1"/>
             </a:lvl9pPr>
           </a:lstStyle>
           <a:p>
@@ -2920,39 +2920,39 @@
           <a:lstStyle>
             <a:lvl1pPr marL="0" indent="0" algn="ctr">
               <a:buNone/>
-              <a:defRPr sz="2400" b="1"/>
+              <a:defRPr sz="1800" b="1"/>
             </a:lvl1pPr>
             <a:lvl2pPr marL="457189" indent="0">
               <a:buNone/>
-              <a:defRPr sz="2000" b="1"/>
+              <a:defRPr sz="1600" b="1"/>
             </a:lvl2pPr>
             <a:lvl3pPr marL="914377" indent="0">
               <a:buNone/>
-              <a:defRPr sz="1800" b="1"/>
+              <a:defRPr sz="1400" b="1"/>
             </a:lvl3pPr>
             <a:lvl4pPr marL="1371566" indent="0">
               <a:buNone/>
-              <a:defRPr sz="1600" b="1"/>
+              <a:defRPr sz="1200" b="1"/>
             </a:lvl4pPr>
             <a:lvl5pPr marL="1828754" indent="0">
               <a:buNone/>
-              <a:defRPr sz="1600" b="1"/>
+              <a:defRPr sz="1200" b="1"/>
             </a:lvl5pPr>
             <a:lvl6pPr marL="2285943" indent="0">
               <a:buNone/>
-              <a:defRPr sz="1600" b="1"/>
+              <a:defRPr sz="1200" b="1"/>
             </a:lvl6pPr>
             <a:lvl7pPr marL="2743131" indent="0">
               <a:buNone/>
-              <a:defRPr sz="1600" b="1"/>
+              <a:defRPr sz="1200" b="1"/>
             </a:lvl7pPr>
             <a:lvl8pPr marL="3200320" indent="0">
               <a:buNone/>
-              <a:defRPr sz="1600" b="1"/>
+              <a:defRPr sz="1200" b="1"/>
             </a:lvl8pPr>
             <a:lvl9pPr marL="3657509" indent="0">
               <a:buNone/>
-              <a:defRPr sz="1600" b="1"/>
+              <a:defRPr sz="1200" b="1"/>
             </a:lvl9pPr>
           </a:lstStyle>
           <a:p>
@@ -3045,35 +3045,35 @@
             <a:lvl1pPr>
               <a:buFont typeface="Arial" panose="020B0604020202020204" pitchFamily="34" charset="0"/>
               <a:buChar char="•"/>
-              <a:defRPr sz="2800"/>
+              <a:defRPr sz="2000"/>
             </a:lvl1pPr>
             <a:lvl2pPr marL="457200" indent="-228600">
               <a:buFont typeface="Wingdings" pitchFamily="2" charset="2"/>
               <a:buChar char="§"/>
-              <a:defRPr sz="2400"/>
+              <a:defRPr sz="1800"/>
             </a:lvl2pPr>
             <a:lvl3pPr marL="914400" indent="-228600">
               <a:buFont typeface="Courier New" panose="02070309020205020404" pitchFamily="49" charset="0"/>
               <a:buChar char="o"/>
-              <a:defRPr sz="2000"/>
+              <a:defRPr sz="1600"/>
             </a:lvl3pPr>
             <a:lvl4pPr marL="1371600" indent="-228600">
-              <a:defRPr sz="1800"/>
+              <a:defRPr sz="1400"/>
             </a:lvl4pPr>
             <a:lvl5pPr marL="1600200" indent="-228600">
-              <a:defRPr sz="1800"/>
+              <a:defRPr sz="1200"/>
             </a:lvl5pPr>
             <a:lvl6pPr>
-              <a:defRPr sz="1800"/>
+              <a:defRPr sz="1200"/>
             </a:lvl6pPr>
             <a:lvl7pPr>
-              <a:defRPr sz="1800"/>
+              <a:defRPr sz="1200"/>
             </a:lvl7pPr>
             <a:lvl8pPr>
-              <a:defRPr sz="1800"/>
+              <a:defRPr sz="1200"/>
             </a:lvl8pPr>
             <a:lvl9pPr>
-              <a:defRPr sz="1800"/>
+              <a:defRPr sz="1200"/>
             </a:lvl9pPr>
           </a:lstStyle>
           <a:p>
@@ -3144,35 +3144,35 @@
             <a:lvl1pPr>
               <a:buFont typeface="Arial" panose="020B0604020202020204" pitchFamily="34" charset="0"/>
               <a:buChar char="•"/>
-              <a:defRPr sz="2800"/>
+              <a:defRPr sz="2000"/>
             </a:lvl1pPr>
             <a:lvl2pPr marL="457200" indent="-228600">
               <a:buFont typeface="Wingdings" pitchFamily="2" charset="2"/>
               <a:buChar char="§"/>
-              <a:defRPr sz="2400"/>
+              <a:defRPr sz="1800"/>
             </a:lvl2pPr>
             <a:lvl3pPr marL="914400" indent="-228600">
               <a:buFont typeface="Courier New" panose="02070309020205020404" pitchFamily="49" charset="0"/>
               <a:buChar char="o"/>
-              <a:defRPr sz="2000"/>
+              <a:defRPr sz="1600"/>
             </a:lvl3pPr>
             <a:lvl4pPr marL="1371600" indent="-228600">
-              <a:defRPr sz="1800"/>
+              <a:defRPr sz="1400"/>
             </a:lvl4pPr>
             <a:lvl5pPr marL="1600200" indent="-228600">
-              <a:defRPr sz="1800"/>
+              <a:defRPr sz="1200"/>
             </a:lvl5pPr>
             <a:lvl6pPr>
-              <a:defRPr sz="1800"/>
+              <a:defRPr sz="1200"/>
             </a:lvl6pPr>
             <a:lvl7pPr>
-              <a:defRPr sz="1800"/>
+              <a:defRPr sz="1200"/>
             </a:lvl7pPr>
             <a:lvl8pPr>
-              <a:defRPr sz="1800"/>
+              <a:defRPr sz="1200"/>
             </a:lvl8pPr>
             <a:lvl9pPr>
-              <a:defRPr sz="1800"/>
+              <a:defRPr sz="1200"/>
             </a:lvl9pPr>
           </a:lstStyle>
           <a:p>
@@ -3390,35 +3390,35 @@
             <a:lvl1pPr>
               <a:buFont typeface="Arial" panose="020B0604020202020204" pitchFamily="34" charset="0"/>
               <a:buChar char="•"/>
-              <a:defRPr sz="3200"/>
+              <a:defRPr sz="2000"/>
             </a:lvl1pPr>
             <a:lvl2pPr>
               <a:buFont typeface="Wingdings" pitchFamily="2" charset="2"/>
               <a:buChar char="§"/>
-              <a:defRPr sz="2800"/>
+              <a:defRPr sz="1800"/>
             </a:lvl2pPr>
             <a:lvl3pPr>
               <a:buFont typeface="Courier New" panose="02070309020205020404" pitchFamily="49" charset="0"/>
               <a:buChar char="o"/>
-              <a:defRPr sz="2400"/>
+              <a:defRPr sz="1600"/>
             </a:lvl3pPr>
             <a:lvl4pPr>
-              <a:defRPr sz="2000"/>
+              <a:defRPr sz="1400"/>
             </a:lvl4pPr>
             <a:lvl5pPr>
-              <a:defRPr sz="2000"/>
+              <a:defRPr sz="1200"/>
             </a:lvl5pPr>
             <a:lvl6pPr>
-              <a:defRPr sz="2000"/>
+              <a:defRPr sz="1200"/>
             </a:lvl6pPr>
             <a:lvl7pPr>
-              <a:defRPr sz="2000"/>
+              <a:defRPr sz="1200"/>
             </a:lvl7pPr>
             <a:lvl8pPr>
-              <a:defRPr sz="2000"/>
+              <a:defRPr sz="1200"/>
             </a:lvl8pPr>
             <a:lvl9pPr>
-              <a:defRPr sz="2000"/>
+              <a:defRPr sz="1200"/>
             </a:lvl9pPr>
           </a:lstStyle>
           <a:p>
@@ -3833,39 +3833,39 @@
           <a:lstStyle>
             <a:lvl1pPr marL="0" indent="0">
               <a:buNone/>
-              <a:defRPr sz="3200"/>
+              <a:defRPr sz="2000"/>
             </a:lvl1pPr>
             <a:lvl2pPr marL="457189" indent="0">
               <a:buNone/>
-              <a:defRPr sz="2800"/>
+              <a:defRPr sz="1800"/>
             </a:lvl2pPr>
             <a:lvl3pPr marL="914377" indent="0">
               <a:buNone/>
-              <a:defRPr sz="2400"/>
+              <a:defRPr sz="1600"/>
             </a:lvl3pPr>
             <a:lvl4pPr marL="1371566" indent="0">
               <a:buNone/>
-              <a:defRPr sz="2000"/>
+              <a:defRPr sz="1400"/>
             </a:lvl4pPr>
             <a:lvl5pPr marL="1828754" indent="0">
               <a:buNone/>
-              <a:defRPr sz="2000"/>
+              <a:defRPr sz="1200"/>
             </a:lvl5pPr>
             <a:lvl6pPr marL="2285943" indent="0">
               <a:buNone/>
-              <a:defRPr sz="2000"/>
+              <a:defRPr sz="1200"/>
             </a:lvl6pPr>
             <a:lvl7pPr marL="2743131" indent="0">
               <a:buNone/>
-              <a:defRPr sz="2000"/>
+              <a:defRPr sz="1200"/>
             </a:lvl7pPr>
             <a:lvl8pPr marL="3200320" indent="0">
               <a:buNone/>
-              <a:defRPr sz="2000"/>
+              <a:defRPr sz="1200"/>
             </a:lvl8pPr>
             <a:lvl9pPr marL="3657509" indent="0">
               <a:buNone/>
-              <a:defRPr sz="2000"/>
+              <a:defRPr sz="1200"/>
             </a:lvl9pPr>
           </a:lstStyle>
           <a:p>
@@ -4669,7 +4669,7 @@
         </a:spcBef>
         <a:buFont typeface="Arial" panose="020B0604020202020204" pitchFamily="34" charset="0"/>
         <a:buChar char="•"/>
-        <a:defRPr sz="2800" b="0" kern="1200" baseline="0">
+        <a:defRPr sz="2000" b="0" kern="1200" baseline="0">
           <a:solidFill>
             <a:schemeClr val="tx1"/>
           </a:solidFill>
@@ -4687,7 +4687,7 @@
         </a:spcBef>
         <a:buFont typeface="Wingdings" pitchFamily="2" charset="2"/>
         <a:buChar char="§"/>
-        <a:defRPr sz="2400" kern="1200" baseline="0">
+        <a:defRPr sz="1800" kern="1200" baseline="0">
           <a:solidFill>
             <a:schemeClr val="tx1"/>
           </a:solidFill>
@@ -4705,7 +4705,7 @@
         </a:spcBef>
         <a:buFont typeface="Courier New" panose="02070309020205020404" pitchFamily="49" charset="0"/>
         <a:buChar char="o"/>
-        <a:defRPr sz="2000" kern="1200" baseline="0">
+        <a:defRPr sz="1600" kern="1200" baseline="0">
           <a:solidFill>
             <a:schemeClr val="tx1"/>
           </a:solidFill>
@@ -4723,7 +4723,7 @@
         </a:spcBef>
         <a:buFont typeface="Arial"/>
         <a:buChar char="–"/>
-        <a:defRPr sz="1800" kern="1200" baseline="0">
+        <a:defRPr sz="1400" kern="1200" baseline="0">
           <a:solidFill>
             <a:schemeClr val="tx1"/>
           </a:solidFill>
@@ -4741,7 +4741,7 @@
         </a:spcBef>
         <a:buFont typeface="Arial"/>
         <a:buChar char="»"/>
-        <a:defRPr sz="1400" kern="1200" baseline="0">
+        <a:defRPr sz="1200" kern="1200" baseline="0">
           <a:solidFill>
             <a:schemeClr val="tx1"/>
           </a:solidFill>
@@ -4756,7 +4756,7 @@
         </a:spcBef>
         <a:buFont typeface="Arial"/>
         <a:buChar char="•"/>
-        <a:defRPr sz="2000" kern="1200">
+        <a:defRPr sz="1200" kern="1200">
           <a:solidFill>
             <a:schemeClr val="tx1"/>
           </a:solidFill>
@@ -4771,7 +4771,7 @@
         </a:spcBef>
         <a:buFont typeface="Arial"/>
         <a:buChar char="•"/>
-        <a:defRPr sz="2000" kern="1200">
+        <a:defRPr sz="1200" kern="1200">
           <a:solidFill>
             <a:schemeClr val="tx1"/>
           </a:solidFill>
@@ -4786,7 +4786,7 @@
         </a:spcBef>
         <a:buFont typeface="Arial"/>
         <a:buChar char="•"/>
-        <a:defRPr sz="2000" kern="1200">
+        <a:defRPr sz="1200" kern="1200">
           <a:solidFill>
             <a:schemeClr val="tx1"/>
           </a:solidFill>
@@ -4801,7 +4801,7 @@
         </a:spcBef>
         <a:buFont typeface="Arial"/>
         <a:buChar char="•"/>
-        <a:defRPr sz="2000" kern="1200">
+        <a:defRPr sz="1200" kern="1200">
           <a:solidFill>
             <a:schemeClr val="tx1"/>
           </a:solidFill>
